--- a/docs/Presentacion_Tecnica_LT411_Final.pptx
+++ b/docs/Presentacion_Tecnica_LT411_Final.pptx
@@ -2922,7 +2922,7 @@
         <p:spPr>
           <a:xfrm>
             <a:off x="6446520" y="2304288"/>
-            <a:ext cx="1325880" cy="777240"/>
+            <a:ext cx="1325880" cy="938784"/>
           </a:xfrm>
           <a:prstGeom prst="roundRect">
             <a:avLst>
@@ -3033,7 +3033,7 @@
         <p:spPr>
           <a:xfrm>
             <a:off x="7955280" y="2304288"/>
-            <a:ext cx="1325880" cy="777240"/>
+            <a:ext cx="1325880" cy="938784"/>
           </a:xfrm>
           <a:prstGeom prst="roundRect">
             <a:avLst>
@@ -3144,7 +3144,7 @@
         <p:spPr>
           <a:xfrm>
             <a:off x="9464040" y="2304288"/>
-            <a:ext cx="1325880" cy="777240"/>
+            <a:ext cx="1325880" cy="938784"/>
           </a:xfrm>
           <a:prstGeom prst="roundRect">
             <a:avLst>
@@ -4303,8 +4303,8 @@
         </p:nvSpPr>
         <p:spPr>
           <a:xfrm>
-            <a:off x="914400" y="3977640"/>
-            <a:ext cx="4572000" cy="914400"/>
+            <a:off x="914400" y="3977639"/>
+            <a:ext cx="4572000" cy="1481865"/>
           </a:xfrm>
           <a:prstGeom prst="roundRect">
             <a:avLst>
